--- a/docs/DD_土岐市妻木町_20261020/案件概要書_土岐市妻木町蓄電所.pptx
+++ b/docs/DD_土岐市妻木町_20261020/案件概要書_土岐市妻木町蓄電所.pptx
@@ -3326,7 +3326,7 @@
                 </a:solidFill>
                 <a:latin typeface="Meiryo"/>
               </a:rPr>
-              <a:t>・浸水・液状化・地すべりの該当なし／市街化調整区域外（机上DD 2026/10/20 時点）</a:t>
+              <a:t>・接続検討回答済（工期7か月）・契約申込済で、2027年8月連系予定の案件です</a:t>
             </a:r>
           </a:p>
         </p:txBody>
@@ -3438,7 +3438,7 @@
                           </a:solidFill>
                           <a:latin typeface="Meiryo"/>
                         </a:rPr>
-                        <a:t>岐阜県土岐市妻木町（地番確認中）</a:t>
+                        <a:t>岐阜県土岐市妻木町西山 3246、56</a:t>
                       </a:r>
                     </a:p>
                     <a:p>
@@ -3523,7 +3523,7 @@
                           </a:solidFill>
                           <a:latin typeface="Meiryo"/>
                         </a:rPr>
-                        <a:t>地目</a:t>
+                        <a:t>地目・面積</a:t>
                       </a:r>
                     </a:p>
                   </a:txBody>
@@ -3546,7 +3546,19 @@
                           </a:solidFill>
                           <a:latin typeface="Meiryo"/>
                         </a:rPr>
-                        <a:t>山林（航空写真より・登記地目確認中）</a:t>
+                        <a:t>山林／蓄電所エリア 約2,000〜2,300㎡</a:t>
+                      </a:r>
+                    </a:p>
+                    <a:p>
+                      <a:pPr algn="r"/>
+                      <a:r>
+                        <a:rPr sz="1200" b="0">
+                          <a:solidFill>
+                            <a:srgbClr val="222222"/>
+                          </a:solidFill>
+                          <a:latin typeface="Meiryo"/>
+                        </a:rPr>
+                        <a:t>公道4.5m・接道 約80m</a:t>
                       </a:r>
                     </a:p>
                   </a:txBody>
@@ -3654,7 +3666,7 @@
                           </a:solidFill>
                           <a:latin typeface="Meiryo"/>
                         </a:rPr>
-                        <a:t>北側に土砂災害警戒区域（土石流）が隣接</a:t>
+                        <a:t>土砂災害警戒区域（土石流・イエロー）に該当</a:t>
                       </a:r>
                     </a:p>
                     <a:p>
@@ -3666,7 +3678,7 @@
                           </a:solidFill>
                           <a:latin typeface="Meiryo"/>
                         </a:rPr>
-                        <a:t>森林法・埋蔵文化財の確認要</a:t>
+                        <a:t>伐採届・埋蔵文化財の確認要</a:t>
                       </a:r>
                     </a:p>
                   </a:txBody>
@@ -3714,7 +3726,19 @@
                           </a:solidFill>
                           <a:latin typeface="Meiryo"/>
                         </a:rPr>
-                        <a:t>机上DD完了、接続検討 未申込</a:t>
+                        <a:t>接続検討回答済（工期7か月）、契約申込済</a:t>
+                      </a:r>
+                    </a:p>
+                    <a:p>
+                      <a:pPr algn="r"/>
+                      <a:r>
+                        <a:rPr sz="1200" b="0">
+                          <a:solidFill>
+                            <a:srgbClr val="222222"/>
+                          </a:solidFill>
+                          <a:latin typeface="Meiryo"/>
+                        </a:rPr>
+                        <a:t>保証金支払済、2026/12 回答予定</a:t>
                       </a:r>
                     </a:p>
                   </a:txBody>
@@ -3762,7 +3786,7 @@
                           </a:solidFill>
                           <a:latin typeface="Meiryo"/>
                         </a:rPr>
-                        <a:t>確認中</a:t>
+                        <a:t>売主にて確保（要確認）</a:t>
                       </a:r>
                     </a:p>
                   </a:txBody>
@@ -3810,7 +3834,7 @@
                           </a:solidFill>
                           <a:latin typeface="Meiryo"/>
                         </a:rPr>
-                        <a:t>確認中</a:t>
+                        <a:t>売買</a:t>
                       </a:r>
                     </a:p>
                   </a:txBody>
@@ -3858,7 +3882,7 @@
                           </a:solidFill>
                           <a:latin typeface="Meiryo"/>
                         </a:rPr>
-                        <a:t>接続検討回答後に確定</a:t>
+                        <a:t>2027 年 8 月（予定）</a:t>
                       </a:r>
                     </a:p>
                   </a:txBody>
@@ -4387,7 +4411,7 @@
                           </a:solidFill>
                           <a:latin typeface="Meiryo"/>
                         </a:rPr>
-                        <a:t>地点は区域外／北側に隣接（約10m）</a:t>
+                        <a:t>該当（蓄電所エリアがイエロー内の見込み）</a:t>
                       </a:r>
                     </a:p>
                   </a:txBody>
@@ -4887,7 +4911,7 @@
                 </a:solidFill>
                 <a:latin typeface="Meiryo"/>
               </a:rPr>
-              <a:t>※ 要確認：①用地の筆と土石流警戒区域の重なり　②森林法（地域森林計画対象民有林・保安林）</a:t>
+              <a:t>※ 要確認：①特別警戒区域（レッド）に掛からないことの筆単位確認　②森林法（伐採届・保安林）</a:t>
             </a:r>
           </a:p>
           <a:p>
@@ -4899,7 +4923,7 @@
                 </a:solidFill>
                 <a:latin typeface="Meiryo"/>
               </a:rPr>
-              <a:t>　③埋蔵文化財包蔵地（美濃焼の古窯跡が多い地域）　④接道・搬入路　⑤開発許可（3,000㎡以上）</a:t>
+              <a:t>　③埋蔵文化財包蔵地（美濃焼の古窯跡が多い地域）　④開発許可（DCエリアと一体で3,000㎡超の場合）</a:t>
             </a:r>
           </a:p>
           <a:p>
